--- a/checkpoint/01-presentation/avito-ai-reviewer-checkpoint-04-09.pptx
+++ b/checkpoint/01-presentation/avito-ai-reviewer-checkpoint-04-09.pptx
@@ -8922,13 +8922,13 @@
               </a:spcAft>
             </a:pPr>
             <a:r>
-              <a:rPr sz="3000" b="1" i="0">
+              <a:rPr sz="2800" b="1" i="0">
                 <a:solidFill>
                   <a:srgbClr val="1B2A4A"/>
                 </a:solidFill>
                 <a:latin typeface="Cambria"/>
               </a:rPr>
-              <a:t>Три класса требований — три способа проверки</a:t>
+              <a:t>Один движок — LLM с тулами, три уровня строгости сигнала</a:t>
             </a:r>
           </a:p>
         </p:txBody>
@@ -8970,7 +8970,7 @@
                 </a:solidFill>
                 <a:latin typeface="Calibri"/>
               </a:rPr>
-              <a:t>Требования рубрики делятся не по теме, а по тому, кто может их проверить</a:t>
+              <a:t>Любое требование детектит LLM, с тулом или без. Любой вердикт — сигнал, аппрувит ревьюер</a:t>
             </a:r>
           </a:p>
         </p:txBody>
@@ -9153,7 +9153,7 @@
                 </a:solidFill>
                 <a:latin typeface="Calibri"/>
               </a:rPr>
-              <a:t>СЧИТАЕТСЯ КОДОМ</a:t>
+              <a:t>LLM + ТУЛ</a:t>
             </a:r>
           </a:p>
         </p:txBody>
@@ -9195,7 +9195,7 @@
                 </a:solidFill>
                 <a:latin typeface="Calibri"/>
               </a:rPr>
-              <a:t>«Построена диаграмма C4» — код ищет блок в тексте. Без модели, без ошибок, бесплатно.</a:t>
+              <a:t>«Построена диаграмма C4» — LLM вызывает тул поиска блока. Детерминированный факт, но тоже сигнал.</a:t>
             </a:r>
           </a:p>
         </p:txBody>
@@ -9378,7 +9378,7 @@
                 </a:solidFill>
                 <a:latin typeface="Calibri"/>
               </a:rPr>
-              <a:t>МОДЕЛЬ + ЦИТАТА</a:t>
+              <a:t>LLM + ЦИТАТА</a:t>
             </a:r>
           </a:p>
         </p:txBody>
@@ -9420,7 +9420,7 @@
                 </a:solidFill>
                 <a:latin typeface="Calibri"/>
               </a:rPr>
-              <a:t>«Есть ли декомпозиция по двум признакам» — модель находит и цитирует, код проверяет, что цитата реальна.</a:t>
+              <a:t>«Есть ли декомпозиция по двум признакам» — LLM находит и цитирует, код валидирует цитату.</a:t>
             </a:r>
           </a:p>
         </p:txBody>
@@ -9603,7 +9603,7 @@
                 </a:solidFill>
                 <a:latin typeface="Calibri"/>
               </a:rPr>
-              <a:t>ТОЛЬКО ЧЕЛОВЕК</a:t>
+              <a:t>LLM СОВЕТУЕТ</a:t>
             </a:r>
           </a:p>
         </p:txBody>
@@ -9645,7 +9645,7 @@
                 </a:solidFill>
                 <a:latin typeface="Calibri"/>
               </a:rPr>
-              <a:t>«Обосновано ли соблюдение SRP» — модель предлагает интервал, решение остаётся за ревьюером.</a:t>
+              <a:t>«Обосновано ли SRP» — LLM предлагает интервал и аргументы, решает человек.</a:t>
             </a:r>
           </a:p>
         </p:txBody>
@@ -9733,7 +9733,7 @@
                 </a:solidFill>
                 <a:latin typeface="Calibri"/>
               </a:rPr>
-              <a:t>На реальной рубрике системного дизайна формальные и содержательные требования уже дают 4.5 из 6 баллов надёжно — до всякого суждения модели.</a:t>
+              <a:t>На реальной рубрике формальные и содержательные сигналы уже дают 4.5 из 6 баллов высокой уверенности — все сигналы аппрувит ревьюер.</a:t>
             </a:r>
           </a:p>
         </p:txBody>
@@ -10514,7 +10514,7 @@
                 </a:solidFill>
                 <a:latin typeface="Calibri"/>
               </a:rPr>
-              <a:t>Проверки кодом</a:t>
+              <a:t>Разбор артефакта</a:t>
             </a:r>
           </a:p>
         </p:txBody>
@@ -10609,7 +10609,7 @@
                 </a:solidFill>
                 <a:latin typeface="Calibri"/>
               </a:rPr>
-              <a:t>Проверка моделью по требованию</a:t>
+              <a:t>LLM по требованию (тул — опционально)</a:t>
             </a:r>
           </a:p>
         </p:txBody>
@@ -10704,7 +10704,7 @@
                 </a:solidFill>
                 <a:latin typeface="Calibri"/>
               </a:rPr>
-              <a:t>Валидация цитаты</a:t>
+              <a:t>Валидация цитат / тулов</a:t>
             </a:r>
           </a:p>
         </p:txBody>
@@ -10799,7 +10799,7 @@
                 </a:solidFill>
                 <a:latin typeface="Calibri"/>
               </a:rPr>
-              <a:t>Сборка результата</a:t>
+              <a:t>Сборка сигналов</a:t>
             </a:r>
           </a:p>
         </p:txBody>
@@ -10841,7 +10841,7 @@
                 </a:solidFill>
                 <a:latin typeface="Calibri"/>
               </a:rPr>
-              <a:t>не зависит от того, домашка это или пул-реквест</a:t>
+              <a:t>все вердикты — сигналы, тул — опция LLM</a:t>
             </a:r>
           </a:p>
         </p:txBody>
